--- a/curso/pptx/S69.pptx
+++ b/curso/pptx/S69.pptx
@@ -4854,7 +4854,7 @@
                 </a:solidFill>
                 <a:latin typeface="Nunito Sans"/>
               </a:rPr>
-              <a:t>Transporte:</a:t>
+              <a:t>交通：</a:t>
             </a:r>
             <a:r>
               <a:rPr sz="2800" b="0">
@@ -4863,7 +4863,7 @@
                 </a:solidFill>
                 <a:latin typeface="Nunito Sans"/>
               </a:rPr>
-              <a:t> andar, bici, transporte público. Es de lo que más cuenta</a:t>
+              <a:t>步行、骑自行车、公共交通。这是影响最大的</a:t>
             </a:r>
           </a:p>
           <a:p>
@@ -4888,7 +4888,7 @@
                 </a:solidFill>
                 <a:latin typeface="Nunito Sans"/>
               </a:rPr>
-              <a:t>Comida:</a:t>
+              <a:t>食物：</a:t>
             </a:r>
             <a:r>
               <a:rPr sz="2800" b="0">
@@ -4897,7 +4897,7 @@
                 </a:solidFill>
                 <a:latin typeface="Nunito Sans"/>
               </a:rPr>
-              <a:t> menos carne y ultraprocesados; no tirar comida</a:t>
+              <a:t>少吃肉和超加工食品；不浪费食物</a:t>
             </a:r>
           </a:p>
           <a:p>
@@ -4922,7 +4922,7 @@
                 </a:solidFill>
                 <a:latin typeface="Nunito Sans"/>
               </a:rPr>
-              <a:t>Consumo:</a:t>
+              <a:t>消费：</a:t>
             </a:r>
             <a:r>
               <a:rPr sz="2800" b="0">
@@ -4931,7 +4931,7 @@
                 </a:solidFill>
                 <a:latin typeface="Nunito Sans"/>
               </a:rPr>
-              <a:t> comprar menos y mejor, reparar, segunda mano</a:t>
+              <a:t>少买、买好的，修理，二手</a:t>
             </a:r>
           </a:p>
           <a:p>
@@ -4956,7 +4956,7 @@
                 </a:solidFill>
                 <a:latin typeface="Nunito Sans"/>
               </a:rPr>
-              <a:t>Energía y agua:</a:t>
+              <a:t>能源和水：</a:t>
             </a:r>
             <a:r>
               <a:rPr sz="2800" b="0">
@@ -4965,7 +4965,7 @@
                 </a:solidFill>
                 <a:latin typeface="Nunito Sans"/>
               </a:rPr>
-              <a:t> apagar lo que no usas, duchas cortas</a:t>
+              <a:t>不用的电器就关掉，淋浴时间短一点</a:t>
             </a:r>
           </a:p>
         </p:txBody>
@@ -5199,7 +5199,7 @@
                 </a:solidFill>
                 <a:latin typeface="Nunito Sans"/>
               </a:rPr>
-              <a:t>«Solo cuenta lo que hago yo»</a:t>
+              <a:t>“只有我自己做的才算数”</a:t>
             </a:r>
           </a:p>
           <a:p>
@@ -5224,7 +5224,7 @@
                 </a:solidFill>
                 <a:latin typeface="Nunito Sans"/>
               </a:rPr>
-              <a:t>«Lo que hago yo no sirve de nada»</a:t>
+              <a:t>“我自己做的没有任何用”</a:t>
             </a:r>
           </a:p>
           <a:p>
@@ -5249,7 +5249,7 @@
                 </a:solidFill>
                 <a:latin typeface="Nunito Sans"/>
               </a:rPr>
-              <a:t>«O cambio yo o cambian los gobiernos»</a:t>
+              <a:t>“要么我改变，要么政府改变”</a:t>
             </a:r>
           </a:p>
         </p:txBody>
@@ -5379,7 +5379,7 @@
                 </a:solidFill>
                 <a:latin typeface="Nunito Sans"/>
               </a:rPr>
-              <a:t>Cuentan los </a:t>
+              <a:t>每个人的</a:t>
             </a:r>
             <a:r>
               <a:rPr sz="2600" b="1">
@@ -5388,7 +5388,7 @@
                 </a:solidFill>
                 <a:latin typeface="Nunito Sans"/>
               </a:rPr>
-              <a:t>gestos</a:t>
+              <a:t>行为</a:t>
             </a:r>
             <a:r>
               <a:rPr sz="2600" b="0">
@@ -5397,7 +5397,7 @@
                 </a:solidFill>
                 <a:latin typeface="Nunito Sans"/>
               </a:rPr>
-              <a:t> de cada uno: transporte, comida, compras</a:t>
+              <a:t>都算数：交通、食物、购物</a:t>
             </a:r>
           </a:p>
           <a:p>
@@ -5416,31 +5416,22 @@
               <a:t>• </a:t>
             </a:r>
             <a:r>
+              <a:rPr sz="2600" b="1">
+                <a:solidFill>
+                  <a:srgbClr val="1F2A44"/>
+                </a:solidFill>
+                <a:latin typeface="Nunito Sans"/>
+              </a:rPr>
+              <a:t>集体的决定</a:t>
+            </a:r>
+            <a:r>
               <a:rPr sz="2600" b="0">
                 <a:solidFill>
                   <a:srgbClr val="1F2A44"/>
                 </a:solidFill>
                 <a:latin typeface="Nunito Sans"/>
               </a:rPr>
-              <a:t>Cuentan las </a:t>
-            </a:r>
-            <a:r>
-              <a:rPr sz="2600" b="1">
-                <a:solidFill>
-                  <a:srgbClr val="1F2A44"/>
-                </a:solidFill>
-                <a:latin typeface="Nunito Sans"/>
-              </a:rPr>
-              <a:t>decisiones colectivas</a:t>
-            </a:r>
-            <a:r>
-              <a:rPr sz="2600" b="0">
-                <a:solidFill>
-                  <a:srgbClr val="1F2A44"/>
-                </a:solidFill>
-                <a:latin typeface="Nunito Sans"/>
-              </a:rPr>
-              <a:t>: energía, ciudades, leyes</a:t>
+              <a:t>也算数：能源、城市、法律</a:t>
             </a:r>
           </a:p>
           <a:p>
@@ -5465,7 +5456,7 @@
                 </a:solidFill>
                 <a:latin typeface="Nunito Sans"/>
               </a:rPr>
-              <a:t>Una cosa empuja a la otra</a:t>
+              <a:t>一件事会推动另一件事</a:t>
             </a:r>
           </a:p>
         </p:txBody>
@@ -7611,7 +7602,7 @@
                 </a:solidFill>
                 <a:latin typeface="Nunito Sans"/>
               </a:rPr>
-              <a:t>Del inglés </a:t>
+              <a:t>来自英语的 </a:t>
             </a:r>
             <a:r>
               <a:rPr sz="2800" b="1">
@@ -7629,7 +7620,7 @@
                 </a:solidFill>
                 <a:latin typeface="Nunito Sans"/>
               </a:rPr>
-              <a:t> (verde) y </a:t>
+              <a:t>（绿色）和 </a:t>
             </a:r>
             <a:r>
               <a:rPr sz="2800" b="1">
@@ -7647,7 +7638,7 @@
                 </a:solidFill>
                 <a:latin typeface="Nunito Sans"/>
               </a:rPr>
-              <a:t> (lavado)</a:t>
+              <a:t>（洗）</a:t>
             </a:r>
           </a:p>
           <a:p>
@@ -7672,7 +7663,7 @@
                 </a:solidFill>
                 <a:latin typeface="Nunito Sans"/>
               </a:rPr>
-              <a:t>Como el clickbait: promete más de lo que hay</a:t>
+              <a:t>就像标题党：承诺的比实际有的更多</a:t>
             </a:r>
           </a:p>
           <a:p>
@@ -7697,7 +7688,7 @@
                 </a:solidFill>
                 <a:latin typeface="Nunito Sans"/>
               </a:rPr>
-              <a:t>En 2024, la UE aprobó una norma contra frases verdes sin pruebas</a:t>
+              <a:t>2024年，欧盟通过了一项针对没有证据的绿色宣传语的规定</a:t>
             </a:r>
           </a:p>
         </p:txBody>
@@ -7888,7 +7879,7 @@
                 </a:solidFill>
                 <a:latin typeface="Nunito Sans"/>
               </a:rPr>
-              <a:t>Palabras vagas</a:t>
+              <a:t>含糊的词</a:t>
             </a:r>
             <a:r>
               <a:rPr sz="2800" b="0">
@@ -7897,7 +7888,7 @@
                 </a:solidFill>
                 <a:latin typeface="Nunito Sans"/>
               </a:rPr>
-              <a:t> sin datos: «eco», «natural», «verde», «sostenible»</a:t>
+              <a:t>，没有数据：“eco”、“天然”、“绿色”、“可持续”</a:t>
             </a:r>
           </a:p>
           <a:p>
@@ -7916,13 +7907,22 @@
               <a:t>• </a:t>
             </a:r>
             <a:r>
+              <a:rPr sz="2800" b="0">
+                <a:solidFill>
+                  <a:srgbClr val="1F2A44"/>
+                </a:solidFill>
+                <a:latin typeface="Nunito Sans"/>
+              </a:rPr>
+              <a:t>对树叶、树木或星球的</a:t>
+            </a:r>
+            <a:r>
               <a:rPr sz="2800" b="1">
                 <a:solidFill>
                   <a:srgbClr val="1F2A44"/>
                 </a:solidFill>
                 <a:latin typeface="Nunito Sans"/>
               </a:rPr>
-              <a:t>Dibujos</a:t>
+              <a:t>图画</a:t>
             </a:r>
             <a:r>
               <a:rPr sz="2800" b="0">
@@ -7931,7 +7931,7 @@
                 </a:solidFill>
                 <a:latin typeface="Nunito Sans"/>
               </a:rPr>
-              <a:t> de hojas, árboles o planetas que no dicen nada</a:t>
+              <a:t>，却什么也没说明</a:t>
             </a:r>
           </a:p>
           <a:p>
@@ -7956,7 +7956,7 @@
                 </a:solidFill>
                 <a:latin typeface="Nunito Sans"/>
               </a:rPr>
-              <a:t>Presumir de </a:t>
+              <a:t>夸耀</a:t>
             </a:r>
             <a:r>
               <a:rPr sz="2800" b="1">
@@ -7965,7 +7965,7 @@
                 </a:solidFill>
                 <a:latin typeface="Nunito Sans"/>
               </a:rPr>
-              <a:t>una cosa pequeña</a:t>
+              <a:t>一件小事</a:t>
             </a:r>
             <a:r>
               <a:rPr sz="2800" b="0">
@@ -7974,7 +7974,7 @@
                 </a:solidFill>
                 <a:latin typeface="Nunito Sans"/>
               </a:rPr>
-              <a:t> y callar la grande</a:t>
+              <a:t>，对大事却闭口不谈</a:t>
             </a:r>
           </a:p>
           <a:p>
@@ -7993,22 +7993,22 @@
               <a:t>• </a:t>
             </a:r>
             <a:r>
+              <a:rPr sz="2800" b="0">
+                <a:solidFill>
+                  <a:srgbClr val="1F2A44"/>
+                </a:solidFill>
+                <a:latin typeface="Nunito Sans"/>
+              </a:rPr>
+              <a:t>品牌自己发明的</a:t>
+            </a:r>
+            <a:r>
               <a:rPr sz="2800" b="1">
                 <a:solidFill>
                   <a:srgbClr val="1F2A44"/>
                 </a:solidFill>
                 <a:latin typeface="Nunito Sans"/>
               </a:rPr>
-              <a:t>Sellos</a:t>
-            </a:r>
-            <a:r>
-              <a:rPr sz="2800" b="0">
-                <a:solidFill>
-                  <a:srgbClr val="1F2A44"/>
-                </a:solidFill>
-                <a:latin typeface="Nunito Sans"/>
-              </a:rPr>
-              <a:t> inventados por la propia marca</a:t>
+              <a:t>标志</a:t>
             </a:r>
           </a:p>
           <a:p>
@@ -8033,7 +8033,7 @@
                 </a:solidFill>
                 <a:latin typeface="Nunito Sans"/>
               </a:rPr>
-              <a:t>Presumir de algo que ya es </a:t>
+              <a:t>夸耀一件本来法律就</a:t>
             </a:r>
             <a:r>
               <a:rPr sz="2800" b="1">
@@ -8042,7 +8042,7 @@
                 </a:solidFill>
                 <a:latin typeface="Nunito Sans"/>
               </a:rPr>
-              <a:t>obligatorio</a:t>
+              <a:t>强制要求</a:t>
             </a:r>
             <a:r>
               <a:rPr sz="2800" b="0">
@@ -8051,7 +8051,7 @@
                 </a:solidFill>
                 <a:latin typeface="Nunito Sans"/>
               </a:rPr>
-              <a:t> por ley</a:t>
+              <a:t>的事</a:t>
             </a:r>
           </a:p>
         </p:txBody>

--- a/curso/pptx/S69.pptx
+++ b/curso/pptx/S69.pptx
@@ -5642,7 +5642,7 @@
                 </a:solidFill>
                 <a:latin typeface="Nunito Sans"/>
               </a:rPr>
-              <a:t>玛亚伦有15个印着树叶图案的布袋子：每家商店都送她。她每个只用一次，然后就收起来。“我很环保，”她说。（编造的例子。）</a:t>
+              <a:t>一个女孩有15个印着树叶图案的布袋子：每家商店都送她。她每个只用一次，然后就收起来。“我很环保，”她说。（编造的例子。）</a:t>
             </a:r>
           </a:p>
         </p:txBody>
